--- a/deck/LedgerLens_Deck.pptx
+++ b/deck/LedgerLens_Deck.pptx
@@ -18460,7 +18460,7 @@
                 </a:solidFill>
                 <a:latin typeface="Segoe UI"/>
               </a:rPr>
-              <a:t>94.4% precision / 89.3% recall against 150 planted, labelled frauds</a:t>
+              <a:t>87.5% precision / 98.0% recall against 150 planted frauds — measured, not asserted</a:t>
             </a:r>
           </a:p>
         </p:txBody>
@@ -21809,7 +21809,7 @@
                 </a:solidFill>
                 <a:latin typeface="Consolas"/>
               </a:rPr>
-              <a:t>94.4%</a:t>
+              <a:t>87.5%</a:t>
             </a:r>
           </a:p>
         </p:txBody>
@@ -21937,7 +21937,7 @@
                 </a:solidFill>
                 <a:latin typeface="Consolas"/>
               </a:rPr>
-              <a:t>89.3%</a:t>
+              <a:t>98.0%</a:t>
             </a:r>
           </a:p>
         </p:txBody>
@@ -22065,7 +22065,7 @@
                 </a:solidFill>
                 <a:latin typeface="Consolas"/>
               </a:rPr>
-              <a:t>91.8%</a:t>
+              <a:t>92.5%</a:t>
             </a:r>
           </a:p>
         </p:txBody>
@@ -22121,7 +22121,7 @@
         <p:spPr>
           <a:xfrm>
             <a:off x="7882128" y="2999232"/>
-            <a:ext cx="3657600" cy="402336"/>
+            <a:ext cx="3657600" cy="548640"/>
           </a:xfrm>
           <a:prstGeom prst="rect">
             <a:avLst/>
@@ -22136,7 +22136,7 @@
           <a:p>
             <a:pPr algn="l">
               <a:lnSpc>
-                <a:spcPct val="130000"/>
+                <a:spcPct val="134000"/>
               </a:lnSpc>
               <a:spcAft>
                 <a:spcPts val="0"/>
@@ -22149,7 +22149,7 @@
                 </a:solidFill>
                 <a:latin typeface="Consolas"/>
               </a:rPr>
-              <a:t>TP 134 · FP 8 · FN 16 · TN 5,689 = 5,847 invoices.</a:t>
+              <a:t>TP 147 · FP 21 · FN 3 · TN 1,358</a:t>
             </a:r>
             <a:br/>
             <a:r>
@@ -22159,7 +22159,17 @@
                 </a:solidFill>
                 <a:latin typeface="Consolas"/>
               </a:rPr>
-              <a:t>TP 134 + FN 16 = the 150 frauds we planted.</a:t>
+              <a:t>TP 147 + FN 3 = the 150 frauds we planted.</a:t>
+            </a:r>
+            <a:br/>
+            <a:r>
+              <a:rPr sz="850" b="0">
+                <a:solidFill>
+                  <a:srgbClr val="A8A498"/>
+                </a:solidFill>
+                <a:latin typeface="Consolas"/>
+              </a:rPr>
+              <a:t>python -m ledgerlens.eval.run</a:t>
             </a:r>
           </a:p>
         </p:txBody>
@@ -22285,7 +22295,7 @@
                 </a:solidFill>
                 <a:latin typeface="Segoe UI"/>
               </a:rPr>
-              <a:t>Price-creep recall is 74%. Drifts under 2% a quarter fall below the detection floor on an 18-month window. We would rather miss it than report it.</a:t>
+              <a:t>Vendor Integrity is our least precise pillar at 77.8% — about one finding in five is an incidental attribute collision, not a relationship. We would rather show you that than round it away.</a:t>
             </a:r>
           </a:p>
         </p:txBody>
@@ -23003,7 +23013,7 @@
                 </a:solidFill>
                 <a:latin typeface="Consolas"/>
               </a:rPr>
-              <a:t>94.4% / 89.3%</a:t>
+              <a:t>87.5% / 98.0%</a:t>
             </a:r>
           </a:p>
         </p:txBody>

--- a/deck/LedgerLens_Deck.pptx
+++ b/deck/LedgerLens_Deck.pptx
@@ -17065,7 +17065,7 @@
                 </a:solidFill>
                 <a:latin typeface="Segoe UI"/>
               </a:rPr>
-              <a:t>Runs fully offline. </a:t>
+              <a:t>The demo runs fully offline. </a:t>
             </a:r>
             <a:r>
               <a:rPr sz="1000" b="0">
@@ -17074,7 +17074,7 @@
                 </a:solidFill>
                 <a:latin typeface="Segoe UI"/>
               </a:rPr>
-              <a:t>No backend, no network calls at runtime, seeded generation — the demo is byte-identical on every reload and cannot fail on venue wifi.</a:t>
+              <a:t>Bundled client-side, seeded, byte-identical on every reload — it cannot fail on venue wifi. The engine is live; only the ‘analyse your own data’ panel calls it.</a:t>
             </a:r>
           </a:p>
         </p:txBody>

--- a/deck/LedgerLens_Deck.pptx
+++ b/deck/LedgerLens_Deck.pptx
@@ -8467,7 +8467,7 @@
                 </a:solidFill>
                 <a:latin typeface="Consolas"/>
               </a:rPr>
-              <a:t>97.2% precision</a:t>
+              <a:t>94.7% precision</a:t>
             </a:r>
           </a:p>
         </p:txBody>
@@ -8848,7 +8848,7 @@
                 </a:solidFill>
                 <a:latin typeface="Consolas"/>
               </a:rPr>
-              <a:t>95.1% precision</a:t>
+              <a:t>97.1% precision</a:t>
             </a:r>
           </a:p>
         </p:txBody>
@@ -9229,7 +9229,7 @@
                 </a:solidFill>
                 <a:latin typeface="Consolas"/>
               </a:rPr>
-              <a:t>90.8% precision</a:t>
+              <a:t>91.5% precision</a:t>
             </a:r>
           </a:p>
         </p:txBody>
@@ -9610,7 +9610,7 @@
                 </a:solidFill>
                 <a:latin typeface="Consolas"/>
               </a:rPr>
-              <a:t>96.4% precision</a:t>
+              <a:t>100.0% precision</a:t>
             </a:r>
           </a:p>
         </p:txBody>
@@ -9991,7 +9991,7 @@
                 </a:solidFill>
                 <a:latin typeface="Consolas"/>
               </a:rPr>
-              <a:t>98.1% precision</a:t>
+              <a:t>97.8% precision</a:t>
             </a:r>
           </a:p>
         </p:txBody>
@@ -18460,7 +18460,7 @@
                 </a:solidFill>
                 <a:latin typeface="Segoe UI"/>
               </a:rPr>
-              <a:t>87.5% precision / 98.0% recall against 150 planted frauds — measured, not asserted</a:t>
+              <a:t>92.5% precision / 98.0% recall against 150 planted frauds — measured, not asserted</a:t>
             </a:r>
           </a:p>
         </p:txBody>
@@ -21809,7 +21809,7 @@
                 </a:solidFill>
                 <a:latin typeface="Consolas"/>
               </a:rPr>
-              <a:t>87.5%</a:t>
+              <a:t>92.5%</a:t>
             </a:r>
           </a:p>
         </p:txBody>
@@ -22065,7 +22065,7 @@
                 </a:solidFill>
                 <a:latin typeface="Consolas"/>
               </a:rPr>
-              <a:t>92.5%</a:t>
+              <a:t>95.1%</a:t>
             </a:r>
           </a:p>
         </p:txBody>
@@ -22149,7 +22149,7 @@
                 </a:solidFill>
                 <a:latin typeface="Consolas"/>
               </a:rPr>
-              <a:t>TP 147 · FP 21 · FN 3 · TN 1,358</a:t>
+              <a:t>TP 147 · FP 12 · FN 3 · TN 1,384</a:t>
             </a:r>
             <a:br/>
             <a:r>
@@ -22295,7 +22295,7 @@
                 </a:solidFill>
                 <a:latin typeface="Segoe UI"/>
               </a:rPr>
-              <a:t>Vendor Integrity is our least precise pillar at 77.8% — about one finding in five is an incidental attribute collision, not a relationship. We would rather show you that than round it away.</a:t>
+              <a:t>We catch 15 of 18 planted price-gouging cases. The misses sit just above the peer median where barely three vendors are comparable. Lowering the threshold would catch them and flag ordinary variation as fraud, which is worse.</a:t>
             </a:r>
           </a:p>
         </p:txBody>
@@ -23013,7 +23013,7 @@
                 </a:solidFill>
                 <a:latin typeface="Consolas"/>
               </a:rPr>
-              <a:t>87.5% / 98.0%</a:t>
+              <a:t>92.5% / 98.0%</a:t>
             </a:r>
           </a:p>
         </p:txBody>

--- a/deck/LedgerLens_Deck.pptx
+++ b/deck/LedgerLens_Deck.pptx
@@ -3929,7 +3929,7 @@
                 </a:solidFill>
                 <a:latin typeface="Consolas"/>
               </a:rPr>
-              <a:t>94.4%</a:t>
+              <a:t>92.5%</a:t>
             </a:r>
           </a:p>
         </p:txBody>

--- a/deck/LedgerLens_Deck.pptx
+++ b/deck/LedgerLens_Deck.pptx
@@ -3929,7 +3929,7 @@
                 </a:solidFill>
                 <a:latin typeface="Consolas"/>
               </a:rPr>
-              <a:t>92.5%</a:t>
+              <a:t>90.2%</a:t>
             </a:r>
           </a:p>
         </p:txBody>
@@ -8467,7 +8467,7 @@
                 </a:solidFill>
                 <a:latin typeface="Consolas"/>
               </a:rPr>
-              <a:t>94.7% precision</a:t>
+              <a:t>91.4% precision</a:t>
             </a:r>
           </a:p>
         </p:txBody>
@@ -8848,7 +8848,7 @@
                 </a:solidFill>
                 <a:latin typeface="Consolas"/>
               </a:rPr>
-              <a:t>97.1% precision</a:t>
+              <a:t>93.8% precision</a:t>
             </a:r>
           </a:p>
         </p:txBody>
@@ -9229,7 +9229,7 @@
                 </a:solidFill>
                 <a:latin typeface="Consolas"/>
               </a:rPr>
-              <a:t>91.5% precision</a:t>
+              <a:t>95.6% precision</a:t>
             </a:r>
           </a:p>
         </p:txBody>
@@ -9991,7 +9991,7 @@
                 </a:solidFill>
                 <a:latin typeface="Consolas"/>
               </a:rPr>
-              <a:t>97.8% precision</a:t>
+              <a:t>97.9% precision</a:t>
             </a:r>
           </a:p>
         </p:txBody>
@@ -18460,7 +18460,7 @@
                 </a:solidFill>
                 <a:latin typeface="Segoe UI"/>
               </a:rPr>
-              <a:t>92.5% precision / 98.0% recall against 150 planted frauds — measured, not asserted</a:t>
+              <a:t>90.2% precision / 98.7% recall against 150 planted frauds — measured, not asserted</a:t>
             </a:r>
           </a:p>
         </p:txBody>
@@ -21809,7 +21809,7 @@
                 </a:solidFill>
                 <a:latin typeface="Consolas"/>
               </a:rPr>
-              <a:t>92.5%</a:t>
+              <a:t>90.2%</a:t>
             </a:r>
           </a:p>
         </p:txBody>
@@ -21937,7 +21937,7 @@
                 </a:solidFill>
                 <a:latin typeface="Consolas"/>
               </a:rPr>
-              <a:t>98.0%</a:t>
+              <a:t>98.7%</a:t>
             </a:r>
           </a:p>
         </p:txBody>
@@ -22065,7 +22065,7 @@
                 </a:solidFill>
                 <a:latin typeface="Consolas"/>
               </a:rPr>
-              <a:t>95.1%</a:t>
+              <a:t>94.3%</a:t>
             </a:r>
           </a:p>
         </p:txBody>
@@ -22149,7 +22149,7 @@
                 </a:solidFill>
                 <a:latin typeface="Consolas"/>
               </a:rPr>
-              <a:t>TP 147 · FP 12 · FN 3 · TN 1,384</a:t>
+              <a:t>TP 148 · FP 16 · FN 2 · TN 1,405</a:t>
             </a:r>
             <a:br/>
             <a:r>
@@ -22159,7 +22159,7 @@
                 </a:solidFill>
                 <a:latin typeface="Consolas"/>
               </a:rPr>
-              <a:t>TP 147 + FN 3 = the 150 frauds we planted.</a:t>
+              <a:t>TP 148 + FN 2 = the 150 frauds we planted.</a:t>
             </a:r>
             <a:br/>
             <a:r>
@@ -22295,7 +22295,7 @@
                 </a:solidFill>
                 <a:latin typeface="Segoe UI"/>
               </a:rPr>
-              <a:t>We catch 15 of 18 planted price-gouging cases. The misses sit just above the peer median where barely three vendors are comparable. Lowering the threshold would catch them and flag ordinary variation as fraud, which is worse.</a:t>
+              <a:t>Duplicates is our least precise pillar at 91.4%. Its transposition rule compares invoice numbers within an edit distance of two, and some genuinely distinct documents differ by that little. Both numbers are shown side by side, so a reviewer dismisses it in seconds.</a:t>
             </a:r>
           </a:p>
         </p:txBody>
@@ -23013,7 +23013,7 @@
                 </a:solidFill>
                 <a:latin typeface="Consolas"/>
               </a:rPr>
-              <a:t>92.5% / 98.0%</a:t>
+              <a:t>90.2% / 98.7%</a:t>
             </a:r>
           </a:p>
         </p:txBody>

--- a/deck/LedgerLens_Deck.pptx
+++ b/deck/LedgerLens_Deck.pptx
@@ -11105,7 +11105,7 @@
                 </a:solidFill>
                 <a:latin typeface="Segoe UI"/>
               </a:rPr>
-              <a:t>Evidence, not alerts</a:t>
+              <a:t>Finding zero: is the ledger real?</a:t>
             </a:r>
           </a:p>
         </p:txBody>
@@ -11147,7 +11147,7 @@
                 </a:solidFill>
                 <a:latin typeface="Segoe UI"/>
               </a:rPr>
-              <a:t>every finding opens the two source documents with matching and differing fields highlighted</a:t>
+              <a:t>Benford, round-number rate, terminal-digit uniformity and filing-time entropy grade the books before anything in them is believed</a:t>
             </a:r>
           </a:p>
         </p:txBody>
@@ -11225,7 +11225,7 @@
                 </a:solidFill>
                 <a:latin typeface="Segoe UI"/>
               </a:rPr>
-              <a:t>Drafted artifacts</a:t>
+              <a:t>Evidence, not alerts</a:t>
             </a:r>
           </a:p>
         </p:txBody>
@@ -11267,7 +11267,7 @@
                 </a:solidFill>
                 <a:latin typeface="Segoe UI"/>
               </a:rPr>
-              <a:t>recovery email, commercial-review letter or audit-committee memo, typed from the finding</a:t>
+              <a:t>every finding opens the two source documents with matching and differing fields highlighted</a:t>
             </a:r>
           </a:p>
         </p:txBody>
@@ -11345,7 +11345,7 @@
                 </a:solidFill>
                 <a:latin typeface="Segoe UI"/>
               </a:rPr>
-              <a:t>Natural language + visible SQL</a:t>
+              <a:t>Tamper-evident by construction</a:t>
             </a:r>
           </a:p>
         </p:txBody>
@@ -11387,7 +11387,7 @@
                 </a:solidFill>
                 <a:latin typeface="Segoe UI"/>
               </a:rPr>
-              <a:t>the query is shown beneath the answer, so nothing can be hallucinated</a:t>
+              <a:t>each finding hashed over its own content and chained to a run root; re-run and the root is identical</a:t>
             </a:r>
           </a:p>
         </p:txBody>
@@ -17036,7 +17036,58 @@
         </p:nvSpPr>
         <p:spPr>
           <a:xfrm>
-            <a:off x="658368" y="5870448"/>
+            <a:off x="658368" y="5596128"/>
+            <a:ext cx="10881360" cy="274320"/>
+          </a:xfrm>
+          <a:prstGeom prst="rect">
+            <a:avLst/>
+          </a:prstGeom>
+          <a:noFill/>
+        </p:spPr>
+        <p:txBody>
+          <a:bodyPr wrap="square" lIns="0" rIns="0" tIns="0" bIns="0" anchor="t">
+            <a:spAutoFit/>
+          </a:bodyPr>
+          <a:lstStyle/>
+          <a:p>
+            <a:pPr algn="l">
+              <a:lnSpc>
+                <a:spcPct val="128000"/>
+              </a:lnSpc>
+              <a:spcAft>
+                <a:spcPts val="0"/>
+              </a:spcAft>
+            </a:pPr>
+            <a:r>
+              <a:rPr sz="1000" b="0">
+                <a:solidFill>
+                  <a:srgbClr val="C9A227"/>
+                </a:solidFill>
+                <a:latin typeface="Segoe UI"/>
+              </a:rPr>
+              <a:t>50,121 invoices in 12.5 seconds</a:t>
+            </a:r>
+            <a:r>
+              <a:rPr sz="1000" b="0">
+                <a:solidFill>
+                  <a:srgbClr val="A8A498"/>
+                </a:solidFill>
+                <a:latin typeface="Segoe UI"/>
+              </a:rPr>
+              <a:t>  ·  ~4,000 documents a second, near-linear from 1,000 to 50,000. The engine is not the bottleneck; getting the data out of the ERP is.</a:t>
+            </a:r>
+          </a:p>
+        </p:txBody>
+      </p:sp>
+      <p:sp>
+        <p:nvSpPr>
+          <p:cNvPr id="71" name="TextBox 70"/>
+          <p:cNvSpPr txBox="1"/>
+          <p:nvPr/>
+        </p:nvSpPr>
+        <p:spPr>
+          <a:xfrm>
+            <a:off x="658368" y="5907024"/>
             <a:ext cx="10881360" cy="274320"/>
           </a:xfrm>
           <a:prstGeom prst="rect">

--- a/deck/LedgerLens_Deck.pptx
+++ b/deck/LedgerLens_Deck.pptx
@@ -3929,7 +3929,7 @@
                 </a:solidFill>
                 <a:latin typeface="Consolas"/>
               </a:rPr>
-              <a:t>90.2%</a:t>
+              <a:t>89.7%</a:t>
             </a:r>
           </a:p>
         </p:txBody>
@@ -18511,7 +18511,7 @@
                 </a:solidFill>
                 <a:latin typeface="Segoe UI"/>
               </a:rPr>
-              <a:t>90.2% precision / 98.7% recall against 150 planted frauds — measured, not asserted</a:t>
+              <a:t>89.7% precision / 98.7% recall against 150 planted frauds — measured, not asserted</a:t>
             </a:r>
           </a:p>
         </p:txBody>
@@ -21860,7 +21860,7 @@
                 </a:solidFill>
                 <a:latin typeface="Consolas"/>
               </a:rPr>
-              <a:t>90.2%</a:t>
+              <a:t>89.7%</a:t>
             </a:r>
           </a:p>
         </p:txBody>
@@ -22116,7 +22116,7 @@
                 </a:solidFill>
                 <a:latin typeface="Consolas"/>
               </a:rPr>
-              <a:t>94.3%</a:t>
+              <a:t>94.0%</a:t>
             </a:r>
           </a:p>
         </p:txBody>
@@ -22200,7 +22200,7 @@
                 </a:solidFill>
                 <a:latin typeface="Consolas"/>
               </a:rPr>
-              <a:t>TP 148 · FP 16 · FN 2 · TN 1,405</a:t>
+              <a:t>TP 148 · FP 17 · FN 2 · TN 1,419</a:t>
             </a:r>
             <a:br/>
             <a:r>
@@ -23064,7 +23064,7 @@
                 </a:solidFill>
                 <a:latin typeface="Consolas"/>
               </a:rPr>
-              <a:t>90.2% / 98.7%</a:t>
+              <a:t>89.7% / 98.7%</a:t>
             </a:r>
           </a:p>
         </p:txBody>
